--- a/examples/sample-deck.pptx
+++ b/examples/sample-deck.pptx
@@ -555,6 +555,17 @@
           <a:p/>
           <a:p>
             <a:r>
+              <a:t>Photos:</a:t>
+            </a:r>
+          </a:p>
+          <a:p>
+            <a:r>
+              <a:t>https://upload.wikimedia.org/wikipedia/commons/thumb/e/e5/Noether.jpg/330px-Noether.jpg</a:t>
+            </a:r>
+          </a:p>
+          <a:p/>
+          <a:p>
+            <a:r>
               <a:t>Contributed by: Mai Hoang</a:t>
             </a:r>
           </a:p>
@@ -670,6 +681,17 @@
           <a:p/>
           <a:p>
             <a:r>
+              <a:t>Photos:</a:t>
+            </a:r>
+          </a:p>
+          <a:p>
+            <a:r>
+              <a:t>https://upload.wikimedia.org/wikipedia/commons/thumb/e/e5/Noether.jpg/330px-Noether.jpg</a:t>
+            </a:r>
+          </a:p>
+          <a:p/>
+          <a:p>
+            <a:r>
               <a:t>Contributed by: Mai Hoang</a:t>
             </a:r>
           </a:p>
@@ -894,6 +916,22 @@
           <a:p/>
           <a:p>
             <a:r>
+              <a:t>Photos:</a:t>
+            </a:r>
+          </a:p>
+          <a:p>
+            <a:r>
+              <a:t>http://www.history.com/images/media/slideshow/women-in-science-and-health/chien-shiung-wu.jpg</a:t>
+            </a:r>
+          </a:p>
+          <a:p>
+            <a:r>
+              <a:t>http://www.uwastudentguild.com/wp-content/uploads/2017/03/20-Chien-Shiung-Wu.jpeg</a:t>
+            </a:r>
+          </a:p>
+          <a:p/>
+          <a:p>
+            <a:r>
               <a:t>Contributed by: Khyrul Khan, Chien-Shiung Wu</a:t>
             </a:r>
           </a:p>
@@ -1015,6 +1053,22 @@
           <a:p>
             <a:r>
               <a:t>Johnson, L. (2018). CWP at physics.UCLA.edu // Chien-Shiung Wu. Cwp.library.ucla.edu. Retrieved 21 February 2018, from http://cwp.library.ucla.edu/Phase2/Wu,_Chien_Shiung@841234567.html Parity | particle physics. (2018). Encyclopedia Britannica. Retrieved 21 February 2018, from https://www.britannica.com/science/parity-particle-physics</a:t>
+            </a:r>
+          </a:p>
+          <a:p/>
+          <a:p>
+            <a:r>
+              <a:t>Photos:</a:t>
+            </a:r>
+          </a:p>
+          <a:p>
+            <a:r>
+              <a:t>http://www.history.com/images/media/slideshow/women-in-science-and-health/chien-shiung-wu.jpg</a:t>
+            </a:r>
+          </a:p>
+          <a:p>
+            <a:r>
+              <a:t>http://www.uwastudentguild.com/wp-content/uploads/2017/03/20-Chien-Shiung-Wu.jpeg</a:t>
             </a:r>
           </a:p>
           <a:p/>

--- a/examples/sample-deck.pptx
+++ b/examples/sample-deck.pptx
@@ -4,6 +4,9 @@
   <p:sldMasterIdLst>
     <p:sldMasterId id="2147483648" r:id="rId1"/>
   </p:sldMasterIdLst>
+  <p:notesMasterIdLst>
+    <p:notesMasterId r:id="rId10"/>
+  </p:notesMasterIdLst>
   <p:sldIdLst>
     <p:sldId id="256" r:id="rId7"/>
     <p:sldId id="257" r:id="rId8"/>
